--- a/assets/pptx/catalog-689.pptx
+++ b/assets/pptx/catalog-689.pptx
@@ -3259,7 +3259,7 @@
                 <a:ea typeface="Ebrima"/>
                 <a:cs typeface="Ebrima"/>
               </a:rPr>
-              <a:t>ሕይወቴን ሁሉ ለአንተ ሰጥቻለሁ (2x)</a:t>
+              <a:t>ሕይወቴን ሁሉ ለአንተ ሰጥቻለሁ 2x</a:t>
             </a:r>
           </a:p>
           <a:p>
@@ -3295,7 +3295,7 @@
                 <a:ea typeface="Ebrima"/>
                 <a:cs typeface="Ebrima"/>
               </a:rPr>
-              <a:t>በፍፁም መደነቅ መገረም ተሞልቷል (2x)</a:t>
+              <a:t>በፍፁም መደነቅ መገረም ተሞልቷል 2x</a:t>
             </a:r>
           </a:p>
           <a:p>
@@ -3457,7 +3457,7 @@
                 <a:ea typeface="Ebrima"/>
                 <a:cs typeface="Ebrima"/>
               </a:rPr>
-              <a:t>ያው ነው ሁሌም ዬሃ (2x)</a:t>
+              <a:t>ያው ነው ሁሌም ዬሃ 2x</a:t>
             </a:r>
           </a:p>
           <a:p>
@@ -3493,7 +3493,7 @@
                 <a:ea typeface="Ebrima"/>
                 <a:cs typeface="Ebrima"/>
               </a:rPr>
-              <a:t>ሕይወቴን ሁሉ ለአንተ ሰጥቻለሁ (2x)</a:t>
+              <a:t>ሕይወቴን ሁሉ ለአንተ ሰጥቻለሁ 2x</a:t>
             </a:r>
           </a:p>
           <a:p>
@@ -3529,7 +3529,7 @@
                 <a:ea typeface="Ebrima"/>
                 <a:cs typeface="Ebrima"/>
               </a:rPr>
-              <a:t>በፍፁም መደነቅ መገረም ተሞልቷል (2x)</a:t>
+              <a:t>በፍፁም መደነቅ መገረም ተሞልቷል 2x</a:t>
             </a:r>
           </a:p>
           <a:p>
@@ -3637,7 +3637,7 @@
                 <a:ea typeface="Ebrima"/>
                 <a:cs typeface="Ebrima"/>
               </a:rPr>
-              <a:t>ያው ነው ሁሌም ዬሃ (2x)</a:t>
+              <a:t>ያው ነው ሁሌም ዬሃ 2x</a:t>
             </a:r>
           </a:p>
           <a:p>
@@ -3673,7 +3673,7 @@
                 <a:ea typeface="Ebrima"/>
                 <a:cs typeface="Ebrima"/>
               </a:rPr>
-              <a:t>ሕይወቴን ሁሉ ለአንተ ሰጥቻለሁ (2x)</a:t>
+              <a:t>ሕይወቴን ሁሉ ለአንተ ሰጥቻለሁ 2x</a:t>
             </a:r>
           </a:p>
           <a:p>
@@ -3709,7 +3709,7 @@
                 <a:ea typeface="Ebrima"/>
                 <a:cs typeface="Ebrima"/>
               </a:rPr>
-              <a:t>በፍፁም መደነቅ መገረም ተሞልቷል (2x)</a:t>
+              <a:t>በፍፁም መደነቅ መገረም ተሞልቷል 2x</a:t>
             </a:r>
           </a:p>
           <a:p>
@@ -3745,7 +3745,7 @@
                 <a:ea typeface="Ebrima"/>
                 <a:cs typeface="Ebrima"/>
               </a:rPr>
-              <a:t>ሁልጊዜ በሕይወቴ አመልክሃለው (4x)</a:t>
+              <a:t>ሁልጊዜ በሕይወቴ አመልክሃለው 4x</a:t>
             </a:r>
           </a:p>
         </p:txBody>
